--- a/docs/presentations/SheDrive-MVP-Presentation.pptx
+++ b/docs/presentations/SheDrive-MVP-Presentation.pptx
@@ -6517,7 +6517,7 @@
                 <a:ea typeface="Calibri" pitchFamily="34" charset="-122"/>
                 <a:cs typeface="Calibri" pitchFamily="34" charset="-120"/>
               </a:rPr>
-              <a:t>Safety is a first-class module — every feature is operationalised with defined SLAs and workflows.</a:t>
+              <a:t>Safety is a first-class module — every SOS is captured, recorded and reviewed.</a:t>
             </a:r>
             <a:endParaRPr lang="en-US" sz="1300" dirty="0"/>
           </a:p>
@@ -6649,7 +6649,7 @@
                 <a:ea typeface="Calibri" pitchFamily="34" charset="-122"/>
                 <a:cs typeface="Calibri" pitchFamily="34" charset="-120"/>
               </a:rPr>
-              <a:t>Available in both Rider and Driver apps. One tap triggers the full response chain automatically.</a:t>
+              <a:t>Available in both Rider and Driver apps. One tap alerts her contacts and records the incident.</a:t>
             </a:r>
             <a:endParaRPr lang="en-US" sz="1150" dirty="0"/>
           </a:p>
@@ -6874,7 +6874,7 @@
                 <a:ea typeface="Georgia" pitchFamily="34" charset="-122"/>
                 <a:cs typeface="Georgia" pitchFamily="34" charset="-120"/>
               </a:rPr>
-              <a:t>Real-Time Ops Alert</a:t>
+              <a:t>Emergency Contacts Alerted</a:t>
             </a:r>
             <a:endParaRPr lang="en-US" sz="1300" dirty="0"/>
           </a:p>
@@ -6913,7 +6913,7 @@
                 <a:ea typeface="Calibri" pitchFamily="34" charset="-122"/>
                 <a:cs typeface="Calibri" pitchFamily="34" charset="-120"/>
               </a:rPr>
-              <a:t>Immediate notification to the Operations SOS queue. Response SLA is tracked per incident.</a:t>
+              <a:t>Her saved emergency contacts are alerted with a live location link. Public emergency numbers (122 / 123) are one tap away.</a:t>
             </a:r>
             <a:endParaRPr lang="en-US" sz="1150" dirty="0"/>
           </a:p>
@@ -7045,7 +7045,7 @@
                 <a:ea typeface="Calibri" pitchFamily="34" charset="-122"/>
                 <a:cs typeface="Calibri" pitchFamily="34" charset="-120"/>
               </a:rPr>
-              <a:t>Structured path: Ops → external authorities. Ministry of Interior: manual process at MVP (direct integration is aspirational).</a:t>
+              <a:t>Every SOS raises a case in the admin portal for review. It is a review queue, not a staffed emergency desk — no response time is implied.</a:t>
             </a:r>
             <a:endParaRPr lang="en-US" sz="1150" dirty="0"/>
           </a:p>
@@ -9075,7 +9075,7 @@
                 <a:ea typeface="Calibri" pitchFamily="34" charset="-122"/>
                 <a:cs typeface="Calibri" pitchFamily="34" charset="-120"/>
               </a:rPr>
-              <a:t>Direct Ministry of Interior line (aspirational)</a:t>
+              <a:t>Staffed 24/7 safety operations desk</a:t>
             </a:r>
             <a:endParaRPr lang="en-US" sz="1150" dirty="0"/>
           </a:p>
@@ -10052,7 +10052,7 @@
                 <a:ea typeface="Georgia" pitchFamily="34" charset="-122"/>
                 <a:cs typeface="Georgia" pitchFamily="34" charset="-120"/>
               </a:rPr>
-              <a:t>Ministry of Interior Integration</a:t>
+              <a:t>SMS Gateway Provider</a:t>
             </a:r>
             <a:endParaRPr lang="en-US" sz="1250" dirty="0"/>
           </a:p>
@@ -10091,7 +10091,7 @@
                 <a:ea typeface="Calibri" pitchFamily="34" charset="-122"/>
                 <a:cs typeface="Calibri" pitchFamily="34" charset="-120"/>
               </a:rPr>
-              <a:t>Direct SOS line to MoI is aspirational — not in MVP. At launch, escalation is a manual Ops process. This must be clearly communicated to all stakeholders.</a:t>
+              <a:t>SOS alerts reach a rider’s or driver’s emergency contacts by SMS. No supplier is contracted yet — selection, per-message cost and delivery reporting must be settled before the safety module is complete.</a:t>
             </a:r>
             <a:endParaRPr lang="en-US" sz="1100" dirty="0"/>
           </a:p>
@@ -10549,7 +10549,7 @@
                 <a:ea typeface="Calibri" pitchFamily="34" charset="-122"/>
                 <a:cs typeface="Calibri" pitchFamily="34" charset="-120"/>
               </a:rPr>
-              <a:t>Direct Ministry of Interior SOS line</a:t>
+              <a:t>Staffed safety operations desk</a:t>
             </a:r>
             <a:endParaRPr lang="en-US" sz="1200" dirty="0"/>
           </a:p>
@@ -14130,48 +14130,9 @@
                 <a:ea typeface="Calibri" pitchFamily="34" charset="-122"/>
                 <a:cs typeface="Calibri" pitchFamily="34" charset="-120"/>
               </a:rPr>
-              <a:t>One-tap SOS in both apps triggers an immediate Ops alert, automated data capture, and a structured escalation workflow through to external authorities.</a:t>
+              <a:t>One-tap SOS in both apps alerts her saved emergency contacts with a live location link, captures the full trip context, and opens a case for admin review.</a:t>
             </a:r>
             <a:endParaRPr lang="en-US" sz="1150" dirty="0"/>
-          </a:p>
-        </p:txBody>
-      </p:sp>
-      <p:sp>
-        <p:nvSpPr>
-          <p:cNvPr id="17" name="Text 15"/>
-          <p:cNvSpPr/>
-          <p:nvPr/>
-        </p:nvSpPr>
-        <p:spPr>
-          <a:xfrm>
-            <a:off x="3364992" y="4224528"/>
-            <a:ext cx="2377440" cy="475488"/>
-          </a:xfrm>
-          <a:prstGeom prst="rect">
-            <a:avLst/>
-          </a:prstGeom>
-          <a:noFill/>
-          <a:ln/>
-        </p:spPr>
-        <p:txBody>
-          <a:bodyPr wrap="square" lIns="0" tIns="0" rIns="0" bIns="0" rtlCol="0" anchor="ctr"/>
-          <a:lstStyle/>
-          <a:p>
-            <a:pPr indent="0" marL="0">
-              <a:buNone/>
-            </a:pPr>
-            <a:r>
-              <a:rPr lang="en-US" sz="950" i="1" dirty="0">
-                <a:solidFill>
-                  <a:srgbClr val="F59E0B"/>
-                </a:solidFill>
-                <a:latin typeface="Calibri" pitchFamily="34" charset="0"/>
-                <a:ea typeface="Calibri" pitchFamily="34" charset="-122"/>
-                <a:cs typeface="Calibri" pitchFamily="34" charset="-120"/>
-              </a:rPr>
-              <a:t>* Direct Ministry of Interior line: aspirational — manual Ops escalation at MVP</a:t>
-            </a:r>
-            <a:endParaRPr lang="en-US" sz="950" dirty="0"/>
           </a:p>
         </p:txBody>
       </p:sp>
